--- a/Managing and Running Python Effectively.pptx
+++ b/Managing and Running Python Effectively.pptx
@@ -137,7 +137,7 @@
 <file path=ppt/revisionInfo.xml><?xml version="1.0" encoding="utf-8"?>
 <p1510:revInfo xmlns:a="http://schemas.openxmlformats.org/drawingml/2006/main" xmlns:r="http://schemas.openxmlformats.org/officeDocument/2006/relationships" xmlns:p1510="http://schemas.microsoft.com/office/powerpoint/2015/10/main">
   <p1510:revLst>
-    <p1510:client id="{ABE8A5DC-E4D8-4FAB-8659-CAE09A8B9936}" v="6" dt="2026-08-26T15:00:49.071"/>
+    <p1510:client id="{EE8022F0-CCAF-4991-B45A-4E19B6C4AE32}" v="2" dt="2026-10-09T09:33:44.950"/>
   </p1510:revLst>
 </p1510:revInfo>
 </file>
@@ -147,295 +147,40 @@
   <pc:docChgLst>
     <pc:chgData name="Cooling, Chris" userId="6dcf99c9-2ba5-410a-8445-0893a3d1421f" providerId="ADAL" clId="{0564427D-CD1D-4B33-9C97-2A8069F97102}"/>
     <pc:docChg chg="undo custSel addSld delSld modSld sldOrd">
-      <pc:chgData name="Cooling, Chris" userId="6dcf99c9-2ba5-410a-8445-0893a3d1421f" providerId="ADAL" clId="{0564427D-CD1D-4B33-9C97-2A8069F97102}" dt="2026-08-26T15:00:35.021" v="691" actId="20577"/>
+      <pc:chgData name="Cooling, Chris" userId="6dcf99c9-2ba5-410a-8445-0893a3d1421f" providerId="ADAL" clId="{0564427D-CD1D-4B33-9C97-2A8069F97102}" dt="2026-10-09T09:34:37.833" v="700" actId="14100"/>
       <pc:docMkLst>
         <pc:docMk/>
       </pc:docMkLst>
-      <pc:sldChg chg="del">
-        <pc:chgData name="Cooling, Chris" userId="6dcf99c9-2ba5-410a-8445-0893a3d1421f" providerId="ADAL" clId="{0564427D-CD1D-4B33-9C97-2A8069F97102}" dt="2026-08-26T14:59:53.323" v="546" actId="47"/>
+      <pc:sldChg chg="addSp delSp modSp mod">
+        <pc:chgData name="Cooling, Chris" userId="6dcf99c9-2ba5-410a-8445-0893a3d1421f" providerId="ADAL" clId="{0564427D-CD1D-4B33-9C97-2A8069F97102}" dt="2026-10-09T09:34:37.833" v="700" actId="14100"/>
         <pc:sldMkLst>
           <pc:docMk/>
-          <pc:sldMk cId="3685198326" sldId="332"/>
-        </pc:sldMkLst>
-      </pc:sldChg>
-      <pc:sldChg chg="new del">
-        <pc:chgData name="Cooling, Chris" userId="6dcf99c9-2ba5-410a-8445-0893a3d1421f" providerId="ADAL" clId="{0564427D-CD1D-4B33-9C97-2A8069F97102}" dt="2026-08-26T15:00:00.670" v="548" actId="2696"/>
-        <pc:sldMkLst>
-          <pc:docMk/>
-          <pc:sldMk cId="1300763686" sldId="362"/>
-        </pc:sldMkLst>
-      </pc:sldChg>
-      <pc:sldChg chg="modSp add mod">
-        <pc:chgData name="Cooling, Chris" userId="6dcf99c9-2ba5-410a-8445-0893a3d1421f" providerId="ADAL" clId="{0564427D-CD1D-4B33-9C97-2A8069F97102}" dt="2026-08-26T15:00:35.021" v="691" actId="20577"/>
-        <pc:sldMkLst>
-          <pc:docMk/>
-          <pc:sldMk cId="2133173284" sldId="362"/>
+          <pc:sldMk cId="1507190070" sldId="359"/>
         </pc:sldMkLst>
         <pc:spChg chg="mod">
-          <ac:chgData name="Cooling, Chris" userId="6dcf99c9-2ba5-410a-8445-0893a3d1421f" providerId="ADAL" clId="{0564427D-CD1D-4B33-9C97-2A8069F97102}" dt="2026-08-26T15:00:08.270" v="565" actId="20577"/>
+          <ac:chgData name="Cooling, Chris" userId="6dcf99c9-2ba5-410a-8445-0893a3d1421f" providerId="ADAL" clId="{0564427D-CD1D-4B33-9C97-2A8069F97102}" dt="2026-10-09T09:33:52.197" v="695" actId="255"/>
           <ac:spMkLst>
             <pc:docMk/>
-            <pc:sldMk cId="2133173284" sldId="362"/>
-            <ac:spMk id="2" creationId="{DD28BE82-AB71-3AA4-83A3-73C55475FA68}"/>
+            <pc:sldMk cId="1507190070" sldId="359"/>
+            <ac:spMk id="6" creationId="{F67B57BE-29B8-B7BA-15CB-930F83F6EB26}"/>
           </ac:spMkLst>
         </pc:spChg>
-        <pc:spChg chg="mod">
-          <ac:chgData name="Cooling, Chris" userId="6dcf99c9-2ba5-410a-8445-0893a3d1421f" providerId="ADAL" clId="{0564427D-CD1D-4B33-9C97-2A8069F97102}" dt="2026-08-26T15:00:35.021" v="691" actId="20577"/>
-          <ac:spMkLst>
+        <pc:picChg chg="add mod">
+          <ac:chgData name="Cooling, Chris" userId="6dcf99c9-2ba5-410a-8445-0893a3d1421f" providerId="ADAL" clId="{0564427D-CD1D-4B33-9C97-2A8069F97102}" dt="2026-10-09T09:34:37.833" v="700" actId="14100"/>
+          <ac:picMkLst>
             <pc:docMk/>
-            <pc:sldMk cId="2133173284" sldId="362"/>
-            <ac:spMk id="3" creationId="{32DAFB3C-82F9-406A-130E-08A88D78BE17}"/>
-          </ac:spMkLst>
-        </pc:spChg>
-      </pc:sldChg>
-      <pc:sldChg chg="modSp del mod modNotesTx">
-        <pc:chgData name="Cooling, Chris" userId="6dcf99c9-2ba5-410a-8445-0893a3d1421f" providerId="ADAL" clId="{0564427D-CD1D-4B33-9C97-2A8069F97102}" dt="2026-08-26T14:59:53.323" v="546" actId="47"/>
-        <pc:sldMkLst>
-          <pc:docMk/>
-          <pc:sldMk cId="2358774407" sldId="409"/>
-        </pc:sldMkLst>
-        <pc:spChg chg="mod">
-          <ac:chgData name="Cooling, Chris" userId="6dcf99c9-2ba5-410a-8445-0893a3d1421f" providerId="ADAL" clId="{0564427D-CD1D-4B33-9C97-2A8069F97102}" dt="2026-08-26T08:47:19.495" v="306" actId="20577"/>
-          <ac:spMkLst>
+            <pc:sldMk cId="1507190070" sldId="359"/>
+            <ac:picMk id="5" creationId="{47511C79-F718-90B2-482D-B9C30B936130}"/>
+          </ac:picMkLst>
+        </pc:picChg>
+        <pc:picChg chg="del">
+          <ac:chgData name="Cooling, Chris" userId="6dcf99c9-2ba5-410a-8445-0893a3d1421f" providerId="ADAL" clId="{0564427D-CD1D-4B33-9C97-2A8069F97102}" dt="2026-10-09T09:33:56.761" v="696" actId="478"/>
+          <ac:picMkLst>
             <pc:docMk/>
-            <pc:sldMk cId="2358774407" sldId="409"/>
-            <ac:spMk id="3" creationId="{AE72B19A-BAEF-7DAE-DDC1-54394DA86691}"/>
-          </ac:spMkLst>
-        </pc:spChg>
-      </pc:sldChg>
-      <pc:sldChg chg="modSp del mod modNotesTx">
-        <pc:chgData name="Cooling, Chris" userId="6dcf99c9-2ba5-410a-8445-0893a3d1421f" providerId="ADAL" clId="{0564427D-CD1D-4B33-9C97-2A8069F97102}" dt="2026-08-26T14:59:53.323" v="546" actId="47"/>
-        <pc:sldMkLst>
-          <pc:docMk/>
-          <pc:sldMk cId="226661273" sldId="410"/>
-        </pc:sldMkLst>
-        <pc:spChg chg="mod">
-          <ac:chgData name="Cooling, Chris" userId="6dcf99c9-2ba5-410a-8445-0893a3d1421f" providerId="ADAL" clId="{0564427D-CD1D-4B33-9C97-2A8069F97102}" dt="2026-08-26T08:45:09.434" v="124" actId="20577"/>
-          <ac:spMkLst>
-            <pc:docMk/>
-            <pc:sldMk cId="226661273" sldId="410"/>
-            <ac:spMk id="3" creationId="{AE72B19A-BAEF-7DAE-DDC1-54394DA86691}"/>
-          </ac:spMkLst>
-        </pc:spChg>
-      </pc:sldChg>
-      <pc:sldChg chg="del modNotesTx">
-        <pc:chgData name="Cooling, Chris" userId="6dcf99c9-2ba5-410a-8445-0893a3d1421f" providerId="ADAL" clId="{0564427D-CD1D-4B33-9C97-2A8069F97102}" dt="2026-08-26T14:59:53.323" v="546" actId="47"/>
-        <pc:sldMkLst>
-          <pc:docMk/>
-          <pc:sldMk cId="2068907722" sldId="411"/>
-        </pc:sldMkLst>
-      </pc:sldChg>
-      <pc:sldChg chg="del">
-        <pc:chgData name="Cooling, Chris" userId="6dcf99c9-2ba5-410a-8445-0893a3d1421f" providerId="ADAL" clId="{0564427D-CD1D-4B33-9C97-2A8069F97102}" dt="2026-08-26T08:39:32.550" v="14" actId="2696"/>
-        <pc:sldMkLst>
-          <pc:docMk/>
-          <pc:sldMk cId="1178621743" sldId="412"/>
-        </pc:sldMkLst>
-      </pc:sldChg>
-      <pc:sldChg chg="del">
-        <pc:chgData name="Cooling, Chris" userId="6dcf99c9-2ba5-410a-8445-0893a3d1421f" providerId="ADAL" clId="{0564427D-CD1D-4B33-9C97-2A8069F97102}" dt="2026-08-26T14:59:53.323" v="546" actId="47"/>
-        <pc:sldMkLst>
-          <pc:docMk/>
-          <pc:sldMk cId="2990836368" sldId="413"/>
-        </pc:sldMkLst>
-      </pc:sldChg>
-      <pc:sldChg chg="del ord">
-        <pc:chgData name="Cooling, Chris" userId="6dcf99c9-2ba5-410a-8445-0893a3d1421f" providerId="ADAL" clId="{0564427D-CD1D-4B33-9C97-2A8069F97102}" dt="2026-08-26T14:59:53.323" v="546" actId="47"/>
-        <pc:sldMkLst>
-          <pc:docMk/>
-          <pc:sldMk cId="2498874559" sldId="414"/>
-        </pc:sldMkLst>
-      </pc:sldChg>
-      <pc:sldChg chg="del">
-        <pc:chgData name="Cooling, Chris" userId="6dcf99c9-2ba5-410a-8445-0893a3d1421f" providerId="ADAL" clId="{0564427D-CD1D-4B33-9C97-2A8069F97102}" dt="2026-08-26T14:59:53.323" v="546" actId="47"/>
-        <pc:sldMkLst>
-          <pc:docMk/>
-          <pc:sldMk cId="1147531970" sldId="415"/>
-        </pc:sldMkLst>
-      </pc:sldChg>
-      <pc:sldChg chg="del">
-        <pc:chgData name="Cooling, Chris" userId="6dcf99c9-2ba5-410a-8445-0893a3d1421f" providerId="ADAL" clId="{0564427D-CD1D-4B33-9C97-2A8069F97102}" dt="2026-08-26T14:59:53.323" v="546" actId="47"/>
-        <pc:sldMkLst>
-          <pc:docMk/>
-          <pc:sldMk cId="3088362139" sldId="416"/>
-        </pc:sldMkLst>
-      </pc:sldChg>
-      <pc:sldChg chg="del">
-        <pc:chgData name="Cooling, Chris" userId="6dcf99c9-2ba5-410a-8445-0893a3d1421f" providerId="ADAL" clId="{0564427D-CD1D-4B33-9C97-2A8069F97102}" dt="2026-08-26T08:39:23.383" v="13" actId="2696"/>
-        <pc:sldMkLst>
-          <pc:docMk/>
-          <pc:sldMk cId="66260932" sldId="417"/>
-        </pc:sldMkLst>
-      </pc:sldChg>
-      <pc:sldChg chg="modSp del mod modNotesTx">
-        <pc:chgData name="Cooling, Chris" userId="6dcf99c9-2ba5-410a-8445-0893a3d1421f" providerId="ADAL" clId="{0564427D-CD1D-4B33-9C97-2A8069F97102}" dt="2026-08-26T14:59:53.323" v="546" actId="47"/>
-        <pc:sldMkLst>
-          <pc:docMk/>
-          <pc:sldMk cId="752139902" sldId="418"/>
-        </pc:sldMkLst>
-        <pc:spChg chg="mod">
-          <ac:chgData name="Cooling, Chris" userId="6dcf99c9-2ba5-410a-8445-0893a3d1421f" providerId="ADAL" clId="{0564427D-CD1D-4B33-9C97-2A8069F97102}" dt="2026-08-26T08:54:07.447" v="394" actId="2711"/>
-          <ac:spMkLst>
-            <pc:docMk/>
-            <pc:sldMk cId="752139902" sldId="418"/>
-            <ac:spMk id="3" creationId="{AE72B19A-BAEF-7DAE-DDC1-54394DA86691}"/>
-          </ac:spMkLst>
-        </pc:spChg>
-      </pc:sldChg>
-      <pc:sldChg chg="modSp del mod modNotesTx">
-        <pc:chgData name="Cooling, Chris" userId="6dcf99c9-2ba5-410a-8445-0893a3d1421f" providerId="ADAL" clId="{0564427D-CD1D-4B33-9C97-2A8069F97102}" dt="2026-08-26T14:59:53.323" v="546" actId="47"/>
-        <pc:sldMkLst>
-          <pc:docMk/>
-          <pc:sldMk cId="3326181046" sldId="419"/>
-        </pc:sldMkLst>
-        <pc:spChg chg="mod">
-          <ac:chgData name="Cooling, Chris" userId="6dcf99c9-2ba5-410a-8445-0893a3d1421f" providerId="ADAL" clId="{0564427D-CD1D-4B33-9C97-2A8069F97102}" dt="2026-08-26T08:54:23.860" v="395" actId="20577"/>
-          <ac:spMkLst>
-            <pc:docMk/>
-            <pc:sldMk cId="3326181046" sldId="419"/>
-            <ac:spMk id="3" creationId="{AE72B19A-BAEF-7DAE-DDC1-54394DA86691}"/>
-          </ac:spMkLst>
-        </pc:spChg>
-      </pc:sldChg>
-      <pc:sldChg chg="del">
-        <pc:chgData name="Cooling, Chris" userId="6dcf99c9-2ba5-410a-8445-0893a3d1421f" providerId="ADAL" clId="{0564427D-CD1D-4B33-9C97-2A8069F97102}" dt="2026-08-26T14:59:53.323" v="546" actId="47"/>
-        <pc:sldMkLst>
-          <pc:docMk/>
-          <pc:sldMk cId="3376151040" sldId="420"/>
-        </pc:sldMkLst>
-      </pc:sldChg>
-      <pc:sldChg chg="del">
-        <pc:chgData name="Cooling, Chris" userId="6dcf99c9-2ba5-410a-8445-0893a3d1421f" providerId="ADAL" clId="{0564427D-CD1D-4B33-9C97-2A8069F97102}" dt="2026-08-26T14:59:53.323" v="546" actId="47"/>
-        <pc:sldMkLst>
-          <pc:docMk/>
-          <pc:sldMk cId="2308101793" sldId="421"/>
-        </pc:sldMkLst>
-      </pc:sldChg>
-      <pc:sldChg chg="del">
-        <pc:chgData name="Cooling, Chris" userId="6dcf99c9-2ba5-410a-8445-0893a3d1421f" providerId="ADAL" clId="{0564427D-CD1D-4B33-9C97-2A8069F97102}" dt="2026-08-26T08:56:05.253" v="529" actId="2696"/>
-        <pc:sldMkLst>
-          <pc:docMk/>
-          <pc:sldMk cId="3901332093" sldId="422"/>
-        </pc:sldMkLst>
-      </pc:sldChg>
-      <pc:sldChg chg="del ord">
-        <pc:chgData name="Cooling, Chris" userId="6dcf99c9-2ba5-410a-8445-0893a3d1421f" providerId="ADAL" clId="{0564427D-CD1D-4B33-9C97-2A8069F97102}" dt="2026-08-26T14:59:53.323" v="546" actId="47"/>
-        <pc:sldMkLst>
-          <pc:docMk/>
-          <pc:sldMk cId="1558813636" sldId="423"/>
-        </pc:sldMkLst>
-      </pc:sldChg>
-      <pc:sldChg chg="del">
-        <pc:chgData name="Cooling, Chris" userId="6dcf99c9-2ba5-410a-8445-0893a3d1421f" providerId="ADAL" clId="{0564427D-CD1D-4B33-9C97-2A8069F97102}" dt="2026-08-26T14:59:53.323" v="546" actId="47"/>
-        <pc:sldMkLst>
-          <pc:docMk/>
-          <pc:sldMk cId="2059856429" sldId="424"/>
-        </pc:sldMkLst>
-      </pc:sldChg>
-      <pc:sldChg chg="del">
-        <pc:chgData name="Cooling, Chris" userId="6dcf99c9-2ba5-410a-8445-0893a3d1421f" providerId="ADAL" clId="{0564427D-CD1D-4B33-9C97-2A8069F97102}" dt="2026-08-26T14:59:53.323" v="546" actId="47"/>
-        <pc:sldMkLst>
-          <pc:docMk/>
-          <pc:sldMk cId="2356515138" sldId="425"/>
-        </pc:sldMkLst>
-      </pc:sldChg>
-      <pc:sldChg chg="del">
-        <pc:chgData name="Cooling, Chris" userId="6dcf99c9-2ba5-410a-8445-0893a3d1421f" providerId="ADAL" clId="{0564427D-CD1D-4B33-9C97-2A8069F97102}" dt="2026-08-26T14:59:53.323" v="546" actId="47"/>
-        <pc:sldMkLst>
-          <pc:docMk/>
-          <pc:sldMk cId="1556729711" sldId="426"/>
-        </pc:sldMkLst>
-      </pc:sldChg>
-      <pc:sldChg chg="del">
-        <pc:chgData name="Cooling, Chris" userId="6dcf99c9-2ba5-410a-8445-0893a3d1421f" providerId="ADAL" clId="{0564427D-CD1D-4B33-9C97-2A8069F97102}" dt="2026-08-26T08:57:15.240" v="530" actId="47"/>
-        <pc:sldMkLst>
-          <pc:docMk/>
-          <pc:sldMk cId="2622411131" sldId="427"/>
-        </pc:sldMkLst>
-      </pc:sldChg>
-      <pc:sldChg chg="del">
-        <pc:chgData name="Cooling, Chris" userId="6dcf99c9-2ba5-410a-8445-0893a3d1421f" providerId="ADAL" clId="{0564427D-CD1D-4B33-9C97-2A8069F97102}" dt="2026-08-26T08:57:15.240" v="530" actId="47"/>
-        <pc:sldMkLst>
-          <pc:docMk/>
-          <pc:sldMk cId="1669763124" sldId="428"/>
-        </pc:sldMkLst>
-      </pc:sldChg>
-      <pc:sldChg chg="del">
-        <pc:chgData name="Cooling, Chris" userId="6dcf99c9-2ba5-410a-8445-0893a3d1421f" providerId="ADAL" clId="{0564427D-CD1D-4B33-9C97-2A8069F97102}" dt="2026-08-26T08:57:21.279" v="531" actId="47"/>
-        <pc:sldMkLst>
-          <pc:docMk/>
-          <pc:sldMk cId="440286946" sldId="429"/>
-        </pc:sldMkLst>
-      </pc:sldChg>
-      <pc:sldChg chg="del ord">
-        <pc:chgData name="Cooling, Chris" userId="6dcf99c9-2ba5-410a-8445-0893a3d1421f" providerId="ADAL" clId="{0564427D-CD1D-4B33-9C97-2A8069F97102}" dt="2026-08-26T14:59:53.323" v="546" actId="47"/>
-        <pc:sldMkLst>
-          <pc:docMk/>
-          <pc:sldMk cId="3427201238" sldId="430"/>
-        </pc:sldMkLst>
-      </pc:sldChg>
-      <pc:sldChg chg="del">
-        <pc:chgData name="Cooling, Chris" userId="6dcf99c9-2ba5-410a-8445-0893a3d1421f" providerId="ADAL" clId="{0564427D-CD1D-4B33-9C97-2A8069F97102}" dt="2026-08-26T14:59:53.323" v="546" actId="47"/>
-        <pc:sldMkLst>
-          <pc:docMk/>
-          <pc:sldMk cId="3924133401" sldId="431"/>
-        </pc:sldMkLst>
-      </pc:sldChg>
-      <pc:sldChg chg="del">
-        <pc:chgData name="Cooling, Chris" userId="6dcf99c9-2ba5-410a-8445-0893a3d1421f" providerId="ADAL" clId="{0564427D-CD1D-4B33-9C97-2A8069F97102}" dt="2026-08-26T14:59:53.323" v="546" actId="47"/>
-        <pc:sldMkLst>
-          <pc:docMk/>
-          <pc:sldMk cId="3530954581" sldId="432"/>
-        </pc:sldMkLst>
-      </pc:sldChg>
-      <pc:sldChg chg="del">
-        <pc:chgData name="Cooling, Chris" userId="6dcf99c9-2ba5-410a-8445-0893a3d1421f" providerId="ADAL" clId="{0564427D-CD1D-4B33-9C97-2A8069F97102}" dt="2026-08-26T14:59:53.323" v="546" actId="47"/>
-        <pc:sldMkLst>
-          <pc:docMk/>
-          <pc:sldMk cId="4232310399" sldId="433"/>
-        </pc:sldMkLst>
-      </pc:sldChg>
-      <pc:sldChg chg="del">
-        <pc:chgData name="Cooling, Chris" userId="6dcf99c9-2ba5-410a-8445-0893a3d1421f" providerId="ADAL" clId="{0564427D-CD1D-4B33-9C97-2A8069F97102}" dt="2026-08-26T14:59:53.323" v="546" actId="47"/>
-        <pc:sldMkLst>
-          <pc:docMk/>
-          <pc:sldMk cId="3844608033" sldId="434"/>
-        </pc:sldMkLst>
-      </pc:sldChg>
-      <pc:sldChg chg="del">
-        <pc:chgData name="Cooling, Chris" userId="6dcf99c9-2ba5-410a-8445-0893a3d1421f" providerId="ADAL" clId="{0564427D-CD1D-4B33-9C97-2A8069F97102}" dt="2026-08-26T14:59:53.323" v="546" actId="47"/>
-        <pc:sldMkLst>
-          <pc:docMk/>
-          <pc:sldMk cId="2504663500" sldId="435"/>
-        </pc:sldMkLst>
-      </pc:sldChg>
-      <pc:sldChg chg="del">
-        <pc:chgData name="Cooling, Chris" userId="6dcf99c9-2ba5-410a-8445-0893a3d1421f" providerId="ADAL" clId="{0564427D-CD1D-4B33-9C97-2A8069F97102}" dt="2026-08-26T14:59:53.323" v="546" actId="47"/>
-        <pc:sldMkLst>
-          <pc:docMk/>
-          <pc:sldMk cId="3556050136" sldId="436"/>
-        </pc:sldMkLst>
-      </pc:sldChg>
-      <pc:sldChg chg="del">
-        <pc:chgData name="Cooling, Chris" userId="6dcf99c9-2ba5-410a-8445-0893a3d1421f" providerId="ADAL" clId="{0564427D-CD1D-4B33-9C97-2A8069F97102}" dt="2026-08-26T14:59:53.323" v="546" actId="47"/>
-        <pc:sldMkLst>
-          <pc:docMk/>
-          <pc:sldMk cId="47953750" sldId="437"/>
-        </pc:sldMkLst>
-      </pc:sldChg>
-      <pc:sldChg chg="new del">
-        <pc:chgData name="Cooling, Chris" userId="6dcf99c9-2ba5-410a-8445-0893a3d1421f" providerId="ADAL" clId="{0564427D-CD1D-4B33-9C97-2A8069F97102}" dt="2026-08-26T10:46:53.090" v="540" actId="47"/>
-        <pc:sldMkLst>
-          <pc:docMk/>
-          <pc:sldMk cId="863481446" sldId="438"/>
-        </pc:sldMkLst>
-      </pc:sldChg>
-      <pc:sldChg chg="new del">
-        <pc:chgData name="Cooling, Chris" userId="6dcf99c9-2ba5-410a-8445-0893a3d1421f" providerId="ADAL" clId="{0564427D-CD1D-4B33-9C97-2A8069F97102}" dt="2026-08-26T10:46:54.460" v="541" actId="47"/>
-        <pc:sldMkLst>
-          <pc:docMk/>
-          <pc:sldMk cId="4086724857" sldId="439"/>
-        </pc:sldMkLst>
+            <pc:sldMk cId="1507190070" sldId="359"/>
+            <ac:picMk id="10" creationId="{AFE56A18-58B5-6525-CCEB-0BFC88D34226}"/>
+          </ac:picMkLst>
+        </pc:picChg>
       </pc:sldChg>
     </pc:docChg>
   </pc:docChgLst>
@@ -524,7 +269,7 @@
           <a:p>
             <a:fld id="{D2E0D2A8-8F95-47C2-ABE1-A779F5A43C98}" type="datetimeFigureOut">
               <a:rPr lang="en-US" smtClean="0"/>
-              <a:t>8/26/2026</a:t>
+              <a:t>10/9/2026</a:t>
             </a:fld>
             <a:endParaRPr lang="en-US"/>
           </a:p>
@@ -1335,7 +1080,7 @@
           <a:p>
             <a:fld id="{3C856526-9870-44E3-9BF4-D7E9F048CE19}" type="datetime1">
               <a:rPr lang="en-GB" smtClean="0"/>
-              <a:t>26/08/2026</a:t>
+              <a:t>09/10/2026</a:t>
             </a:fld>
             <a:endParaRPr lang="en-GB"/>
           </a:p>
@@ -1661,7 +1406,7 @@
           <a:p>
             <a:fld id="{E2715DC3-E7CE-491C-B0F8-9FB0C1A9D971}" type="datetime1">
               <a:rPr lang="en-GB" smtClean="0"/>
-              <a:t>26/08/2026</a:t>
+              <a:t>09/10/2026</a:t>
             </a:fld>
             <a:endParaRPr lang="en-GB"/>
           </a:p>
@@ -1989,7 +1734,7 @@
           <a:p>
             <a:fld id="{3E12C797-3D51-4532-86C6-808DD4FA685E}" type="datetime1">
               <a:rPr lang="en-GB" smtClean="0"/>
-              <a:t>26/08/2026</a:t>
+              <a:t>09/10/2026</a:t>
             </a:fld>
             <a:endParaRPr lang="en-GB"/>
           </a:p>
@@ -2365,7 +2110,7 @@
           <a:p>
             <a:fld id="{27C69686-0FBF-4501-81F5-40C710430EB0}" type="datetime1">
               <a:rPr lang="en-GB" smtClean="0"/>
-              <a:t>26/08/2026</a:t>
+              <a:t>09/10/2026</a:t>
             </a:fld>
             <a:endParaRPr lang="en-GB"/>
           </a:p>
@@ -2749,7 +2494,7 @@
           <a:p>
             <a:fld id="{07F43393-4ECE-48F4-84E5-60E541CE8671}" type="datetime1">
               <a:rPr lang="en-GB" smtClean="0"/>
-              <a:t>26/08/2026</a:t>
+              <a:t>09/10/2026</a:t>
             </a:fld>
             <a:endParaRPr lang="en-GB"/>
           </a:p>
@@ -3135,7 +2880,7 @@
           <a:p>
             <a:fld id="{67519201-7190-4B7A-8C0C-58AEE0DC7430}" type="datetime1">
               <a:rPr lang="en-GB" smtClean="0"/>
-              <a:t>26/08/2026</a:t>
+              <a:t>09/10/2026</a:t>
             </a:fld>
             <a:endParaRPr lang="en-GB"/>
           </a:p>
@@ -3363,7 +3108,7 @@
           <a:p>
             <a:fld id="{10623FC2-6830-4AE1-A246-5A56A4647077}" type="datetime1">
               <a:rPr lang="en-GB" smtClean="0"/>
-              <a:t>26/08/2026</a:t>
+              <a:t>09/10/2026</a:t>
             </a:fld>
             <a:endParaRPr lang="en-GB"/>
           </a:p>
@@ -3861,7 +3606,7 @@
           <a:p>
             <a:fld id="{E8511495-6DAD-496D-8110-FBBD835BD3A9}" type="datetime1">
               <a:rPr lang="en-GB" smtClean="0"/>
-              <a:t>26/08/2026</a:t>
+              <a:t>09/10/2026</a:t>
             </a:fld>
             <a:endParaRPr lang="en-GB"/>
           </a:p>
@@ -4361,7 +4106,7 @@
           <a:p>
             <a:fld id="{7C843B13-6A48-423F-B4AB-E1AF9D3CF21B}" type="datetime1">
               <a:rPr lang="en-GB" smtClean="0"/>
-              <a:t>26/08/2026</a:t>
+              <a:t>09/10/2026</a:t>
             </a:fld>
             <a:endParaRPr lang="en-GB"/>
           </a:p>
@@ -4851,7 +4596,7 @@
           <a:p>
             <a:fld id="{56A83211-21A1-4A01-BFDD-83E69FB2A09E}" type="datetime1">
               <a:rPr lang="en-GB" smtClean="0"/>
-              <a:t>26/08/2026</a:t>
+              <a:t>09/10/2026</a:t>
             </a:fld>
             <a:endParaRPr lang="en-GB"/>
           </a:p>
@@ -5662,7 +5407,7 @@
           <a:p>
             <a:fld id="{4DB54F66-C1A0-4CAE-8B60-BA02AB871479}" type="datetime1">
               <a:rPr lang="en-GB" smtClean="0"/>
-              <a:t>26/08/2026</a:t>
+              <a:t>09/10/2026</a:t>
             </a:fld>
             <a:endParaRPr lang="en-GB"/>
           </a:p>
@@ -6279,7 +6024,7 @@
           <a:p>
             <a:fld id="{62D94E9C-946A-434F-8C97-5DAB74C4AB63}" type="datetime1">
               <a:rPr lang="en-GB" smtClean="0"/>
-              <a:t>26/08/2026</a:t>
+              <a:t>09/10/2026</a:t>
             </a:fld>
             <a:endParaRPr lang="en-GB"/>
           </a:p>
@@ -6899,7 +6644,7 @@
           <a:p>
             <a:fld id="{72C46D22-C71B-464B-B075-EE6B5090E8AB}" type="datetime1">
               <a:rPr lang="en-GB" smtClean="0"/>
-              <a:t>26/08/2026</a:t>
+              <a:t>09/10/2026</a:t>
             </a:fld>
             <a:endParaRPr lang="en-GB"/>
           </a:p>
@@ -7070,7 +6815,7 @@
           <a:p>
             <a:fld id="{209E91A2-C31B-4762-B78F-5DF8A7B35BC5}" type="datetime1">
               <a:rPr lang="en-GB" smtClean="0"/>
-              <a:t>26/08/2026</a:t>
+              <a:t>09/10/2026</a:t>
             </a:fld>
             <a:endParaRPr lang="en-GB"/>
           </a:p>
@@ -7243,7 +6988,7 @@
           <a:p>
             <a:fld id="{78B7688D-A8DB-4F29-8933-5197E215CAB4}" type="datetime1">
               <a:rPr lang="en-GB" smtClean="0"/>
-              <a:t>26/08/2026</a:t>
+              <a:t>09/10/2026</a:t>
             </a:fld>
             <a:endParaRPr lang="en-GB"/>
           </a:p>
@@ -7422,7 +7167,7 @@
           <a:p>
             <a:fld id="{568DD26D-53E9-4B0A-82DD-E320CE5DB387}" type="datetime1">
               <a:rPr lang="en-GB" smtClean="0"/>
-              <a:t>26/08/2026</a:t>
+              <a:t>09/10/2026</a:t>
             </a:fld>
             <a:endParaRPr lang="en-GB" dirty="0"/>
           </a:p>
@@ -7616,7 +7361,7 @@
           <a:p>
             <a:fld id="{C7C05D2C-BD15-49D3-9CFD-524456171BC3}" type="datetime1">
               <a:rPr lang="en-GB" smtClean="0"/>
-              <a:t>26/08/2026</a:t>
+              <a:t>09/10/2026</a:t>
             </a:fld>
             <a:endParaRPr lang="en-GB" dirty="0"/>
           </a:p>
@@ -7896,7 +7641,7 @@
           <a:p>
             <a:fld id="{C253D521-DAE9-4273-B02B-517ADBE95ADE}" type="datetime1">
               <a:rPr lang="en-GB" smtClean="0"/>
-              <a:t>26/08/2026</a:t>
+              <a:t>09/10/2026</a:t>
             </a:fld>
             <a:endParaRPr lang="en-GB" dirty="0"/>
           </a:p>
@@ -8177,7 +7922,7 @@
           <a:p>
             <a:fld id="{78AB5826-BEE2-45C6-9764-C15A939A56F1}" type="datetime1">
               <a:rPr lang="en-GB" smtClean="0"/>
-              <a:t>26/08/2026</a:t>
+              <a:t>09/10/2026</a:t>
             </a:fld>
             <a:endParaRPr lang="en-GB" dirty="0"/>
           </a:p>
@@ -8457,7 +8202,7 @@
           <a:p>
             <a:fld id="{46D4065F-3461-422F-ADF2-C5E46AB7660A}" type="datetime1">
               <a:rPr lang="en-GB" smtClean="0"/>
-              <a:t>26/08/2026</a:t>
+              <a:t>09/10/2026</a:t>
             </a:fld>
             <a:endParaRPr lang="en-GB" dirty="0"/>
           </a:p>
@@ -8933,7 +8678,7 @@
           <a:p>
             <a:fld id="{0A51B3F2-99CF-4B38-92A9-D778481859B9}" type="datetime1">
               <a:rPr lang="en-GB" smtClean="0"/>
-              <a:t>26/08/2026</a:t>
+              <a:t>09/10/2026</a:t>
             </a:fld>
             <a:endParaRPr lang="en-GB" dirty="0"/>
           </a:p>
@@ -9213,7 +8958,7 @@
           <a:p>
             <a:fld id="{7337D3B9-C701-4DDA-9E3B-9063CFCE1FE3}" type="datetime1">
               <a:rPr lang="en-GB" smtClean="0"/>
-              <a:t>26/08/2026</a:t>
+              <a:t>09/10/2026</a:t>
             </a:fld>
             <a:endParaRPr lang="en-GB" dirty="0"/>
           </a:p>
@@ -9493,7 +9238,7 @@
           <a:p>
             <a:fld id="{F30669BC-1E6C-456F-9CA0-8C943D622990}" type="datetime1">
               <a:rPr lang="en-GB" smtClean="0"/>
-              <a:t>26/08/2026</a:t>
+              <a:t>09/10/2026</a:t>
             </a:fld>
             <a:endParaRPr lang="en-GB" dirty="0"/>
           </a:p>
@@ -9757,7 +9502,7 @@
           <a:p>
             <a:fld id="{B2F6866C-8E19-471A-9A6F-4C602756F1BE}" type="datetime1">
               <a:rPr lang="en-GB" smtClean="0"/>
-              <a:t>26/08/2026</a:t>
+              <a:t>09/10/2026</a:t>
             </a:fld>
             <a:endParaRPr lang="en-GB"/>
           </a:p>
@@ -10145,7 +9890,7 @@
           <a:p>
             <a:fld id="{28580FE4-FE19-4D27-B8DB-8640016E371F}" type="datetime1">
               <a:rPr lang="en-GB" smtClean="0"/>
-              <a:t>26/08/2026</a:t>
+              <a:t>09/10/2026</a:t>
             </a:fld>
             <a:endParaRPr lang="en-GB"/>
           </a:p>
@@ -10527,7 +10272,7 @@
           <a:p>
             <a:fld id="{5A8C8F83-EE5B-4025-9D10-F448FDC50D0F}" type="datetime1">
               <a:rPr lang="en-GB" smtClean="0"/>
-              <a:t>26/08/2026</a:t>
+              <a:t>09/10/2026</a:t>
             </a:fld>
             <a:endParaRPr lang="en-GB"/>
           </a:p>
@@ -10899,7 +10644,7 @@
           <a:p>
             <a:fld id="{428E635D-757E-46F7-95E1-EAB1541A0A2C}" type="datetime1">
               <a:rPr lang="en-GB" smtClean="0"/>
-              <a:t>26/08/2026</a:t>
+              <a:t>09/10/2026</a:t>
             </a:fld>
             <a:endParaRPr lang="en-GB"/>
           </a:p>
@@ -11306,7 +11051,7 @@
           <a:p>
             <a:fld id="{06AAFD94-ADD6-4AE6-B350-670FB6E913BF}" type="datetime1">
               <a:rPr lang="en-GB" smtClean="0"/>
-              <a:t>26/08/2026</a:t>
+              <a:t>09/10/2026</a:t>
             </a:fld>
             <a:endParaRPr lang="en-GB"/>
           </a:p>
@@ -11715,7 +11460,7 @@
           <a:p>
             <a:fld id="{AE44F9FF-0E64-435C-949E-AD1A43BD3775}" type="datetime1">
               <a:rPr lang="en-GB" smtClean="0"/>
-              <a:t>26/08/2026</a:t>
+              <a:t>09/10/2026</a:t>
             </a:fld>
             <a:endParaRPr lang="en-GB"/>
           </a:p>
@@ -12114,7 +11859,7 @@
           <a:p>
             <a:fld id="{501CB022-060A-4526-8B10-446AE09B5D04}" type="datetime1">
               <a:rPr lang="en-GB" smtClean="0"/>
-              <a:t>26/08/2026</a:t>
+              <a:t>09/10/2026</a:t>
             </a:fld>
             <a:endParaRPr lang="en-GB"/>
           </a:p>
@@ -12912,7 +12657,7 @@
           <a:p>
             <a:fld id="{27A19B55-A832-449A-80EA-F39FE39FAC92}" type="datetime1">
               <a:rPr lang="en-GB" smtClean="0"/>
-              <a:t>26/08/2026</a:t>
+              <a:t>09/10/2026</a:t>
             </a:fld>
             <a:endParaRPr lang="en-GB"/>
           </a:p>
@@ -13516,7 +13261,7 @@
           <a:p>
             <a:fld id="{67962411-75DB-4901-9DEA-DFA44055B622}" type="datetime1">
               <a:rPr lang="en-GB" smtClean="0"/>
-              <a:t>26/08/2026</a:t>
+              <a:t>09/10/2026</a:t>
             </a:fld>
             <a:endParaRPr lang="en-GB"/>
           </a:p>
@@ -14110,7 +13855,7 @@
           <a:p>
             <a:fld id="{44718053-350F-43F2-8587-0DFE4F77979D}" type="datetime1">
               <a:rPr lang="en-GB" smtClean="0"/>
-              <a:t>26/08/2026</a:t>
+              <a:t>09/10/2026</a:t>
             </a:fld>
             <a:endParaRPr lang="en-GB"/>
           </a:p>
@@ -14447,7 +14192,7 @@
           <a:p>
             <a:fld id="{98EAD178-8353-4240-A873-6C4203DAD423}" type="datetime1">
               <a:rPr lang="en-GB" smtClean="0"/>
-              <a:t>26/08/2026</a:t>
+              <a:t>09/10/2026</a:t>
             </a:fld>
             <a:endParaRPr lang="en-GB"/>
           </a:p>
@@ -14786,7 +14531,7 @@
           <a:p>
             <a:fld id="{718CE987-E859-4E8A-A836-1BA2C4CFA032}" type="datetime1">
               <a:rPr lang="en-GB" smtClean="0"/>
-              <a:t>26/08/2026</a:t>
+              <a:t>09/10/2026</a:t>
             </a:fld>
             <a:endParaRPr lang="en-GB"/>
           </a:p>
@@ -15115,7 +14860,7 @@
           <a:p>
             <a:fld id="{D993A7F3-6028-4606-8533-AC5952F11625}" type="datetime1">
               <a:rPr lang="en-GB" smtClean="0"/>
-              <a:t>26/08/2026</a:t>
+              <a:t>09/10/2026</a:t>
             </a:fld>
             <a:endParaRPr lang="en-GB"/>
           </a:p>
@@ -15452,7 +15197,7 @@
           <a:p>
             <a:fld id="{0EE3FF68-F82B-417B-ACC9-A2050BEBACED}" type="datetime1">
               <a:rPr lang="en-GB" smtClean="0"/>
-              <a:t>26/08/2026</a:t>
+              <a:t>09/10/2026</a:t>
             </a:fld>
             <a:endParaRPr lang="en-GB"/>
           </a:p>
@@ -15791,7 +15536,7 @@
           <a:p>
             <a:fld id="{AF760619-BA02-4EED-AD43-EBD4CD5AF3CA}" type="datetime1">
               <a:rPr lang="en-GB" smtClean="0"/>
-              <a:t>26/08/2026</a:t>
+              <a:t>09/10/2026</a:t>
             </a:fld>
             <a:endParaRPr lang="en-GB"/>
           </a:p>
@@ -16120,7 +15865,7 @@
           <a:p>
             <a:fld id="{32190DEC-A2EA-46FF-85E5-B66ECBC25D96}" type="datetime1">
               <a:rPr lang="en-GB" smtClean="0"/>
-              <a:t>26/08/2026</a:t>
+              <a:t>09/10/2026</a:t>
             </a:fld>
             <a:endParaRPr lang="en-GB"/>
           </a:p>
@@ -16358,7 +16103,7 @@
           <a:p>
             <a:fld id="{98554488-E073-4628-8790-5E7014105AD0}" type="datetime1">
               <a:rPr lang="en-GB" smtClean="0"/>
-              <a:t>26/08/2026</a:t>
+              <a:t>09/10/2026</a:t>
             </a:fld>
             <a:endParaRPr lang="en-GB"/>
           </a:p>
@@ -16794,7 +16539,7 @@
           <a:p>
             <a:fld id="{59BBD372-E042-4E6A-96E2-6865830247CB}" type="datetime1">
               <a:rPr lang="en-GB" smtClean="0"/>
-              <a:t>26/08/2026</a:t>
+              <a:t>09/10/2026</a:t>
             </a:fld>
             <a:endParaRPr lang="en-GB"/>
           </a:p>
@@ -17332,7 +17077,7 @@
           <a:p>
             <a:fld id="{1EE33CFB-924C-487D-AE6C-F81279D83EA2}" type="datetime1">
               <a:rPr lang="en-GB" smtClean="0"/>
-              <a:t>26/08/2026</a:t>
+              <a:t>09/10/2026</a:t>
             </a:fld>
             <a:endParaRPr lang="en-GB"/>
           </a:p>
@@ -17611,7 +17356,7 @@
           <a:p>
             <a:fld id="{4C872EF4-9550-4286-8C2F-D49A9A76E881}" type="datetime1">
               <a:rPr lang="en-GB" smtClean="0"/>
-              <a:t>26/08/2026</a:t>
+              <a:t>09/10/2026</a:t>
             </a:fld>
             <a:endParaRPr lang="en-GB"/>
           </a:p>
@@ -17896,7 +17641,7 @@
           <a:p>
             <a:fld id="{C9077BD5-B19C-4C78-8A76-FC75812C6D12}" type="datetime1">
               <a:rPr lang="en-GB" smtClean="0"/>
-              <a:t>26/08/2026</a:t>
+              <a:t>09/10/2026</a:t>
             </a:fld>
             <a:endParaRPr lang="en-GB"/>
           </a:p>
@@ -18189,7 +17934,7 @@
           <a:p>
             <a:fld id="{575C80E1-0151-4332-A139-266FE14E3417}" type="datetime1">
               <a:rPr lang="en-GB" smtClean="0"/>
-              <a:t>26/08/2026</a:t>
+              <a:t>09/10/2026</a:t>
             </a:fld>
             <a:endParaRPr lang="en-GB"/>
           </a:p>
@@ -18606,7 +18351,7 @@
           <a:p>
             <a:fld id="{A8EE03A6-590E-402F-8243-84D04E2AE911}" type="datetime1">
               <a:rPr lang="en-GB" smtClean="0"/>
-              <a:t>26/08/2026</a:t>
+              <a:t>09/10/2026</a:t>
             </a:fld>
             <a:endParaRPr lang="en-GB" dirty="0"/>
           </a:p>
@@ -19400,7 +19145,7 @@
           <a:p>
             <a:fld id="{03CDD438-17AF-4711-9197-AAD3CB5FF7AD}" type="datetime1">
               <a:rPr lang="en-GB" smtClean="0"/>
-              <a:t>26/08/2026</a:t>
+              <a:t>09/10/2026</a:t>
             </a:fld>
             <a:endParaRPr lang="en-GB"/>
           </a:p>
@@ -19708,7 +19453,7 @@
           <a:p>
             <a:fld id="{1FC8AFE5-B5B8-44C3-88EE-9DCF7FE84B48}" type="datetime1">
               <a:rPr lang="en-GB" smtClean="0"/>
-              <a:t>26/08/2026</a:t>
+              <a:t>09/10/2026</a:t>
             </a:fld>
             <a:endParaRPr lang="en-GB"/>
           </a:p>
@@ -19953,7 +19698,7 @@
           <a:p>
             <a:fld id="{1FC8AFE5-B5B8-44C3-88EE-9DCF7FE84B48}" type="datetime1">
               <a:rPr lang="en-GB" smtClean="0"/>
-              <a:t>26/08/2026</a:t>
+              <a:t>09/10/2026</a:t>
             </a:fld>
             <a:endParaRPr lang="en-GB"/>
           </a:p>
@@ -20119,7 +19864,7 @@
           <a:p>
             <a:fld id="{F0BF9B1A-B6F2-42EB-8E1B-5799D3EC8AC9}" type="datetime1">
               <a:rPr lang="en-GB" smtClean="0"/>
-              <a:t>26/08/2026</a:t>
+              <a:t>09/10/2026</a:t>
             </a:fld>
             <a:endParaRPr lang="en-GB"/>
           </a:p>
@@ -20287,26 +20032,18 @@
             </a:pPr>
             <a:r>
               <a:rPr lang="en-GB" sz="2800" dirty="0"/>
-              <a:t>The link </a:t>
-            </a:r>
-            <a:r>
-              <a:rPr lang="en-GB" sz="2800"/>
-              <a:t>is </a:t>
-            </a:r>
-            <a:r>
-              <a:rPr lang="en-GB" sz="2800" u="sng">
-                <a:solidFill>
-                  <a:srgbClr val="0563C1"/>
-                </a:solidFill>
+              <a:t>The link is </a:t>
+            </a:r>
+            <a:r>
+              <a:rPr lang="en-GB" sz="2800" dirty="0">
                 <a:hlinkClick r:id="rId3"/>
               </a:rPr>
-              <a:t>https://ecri.short.gy/feedback-rcds</a:t>
-            </a:r>
-            <a:endParaRPr lang="en-GB" sz="2800" u="sng">
-              <a:solidFill>
-                <a:srgbClr val="0563C1"/>
-              </a:solidFill>
-            </a:endParaRPr>
+              <a:t>https://ecri.short.gy/feedback-py-manage</a:t>
+            </a:r>
+            <a:r>
+              <a:rPr lang="en-GB" sz="2800" dirty="0"/>
+              <a:t> </a:t>
+            </a:r>
           </a:p>
           <a:p>
             <a:pPr marL="457200" lvl="1" indent="-457200">
@@ -20314,12 +20051,8 @@
               <a:buChar char="•"/>
             </a:pPr>
             <a:r>
-              <a:rPr lang="en-GB" sz="2800"/>
-              <a:t>You </a:t>
-            </a:r>
-            <a:r>
               <a:rPr lang="en-GB" sz="2800" dirty="0"/>
-              <a:t>should also have received an email with this link</a:t>
+              <a:t>You should also have received an email with this link</a:t>
             </a:r>
           </a:p>
           <a:p>
@@ -20339,10 +20072,10 @@
       </p:sp>
       <p:pic>
         <p:nvPicPr>
-          <p:cNvPr id="10" name="Picture 9" descr="A qr code on a white background&#10;&#10;AI-generated content may be incorrect.">
-            <a:extLst>
-              <a:ext uri="{FF2B5EF4-FFF2-40B4-BE49-F238E27FC236}">
-                <a16:creationId xmlns:a16="http://schemas.microsoft.com/office/drawing/2014/main" id="{AFE56A18-58B5-6525-CCEB-0BFC88D34226}"/>
+          <p:cNvPr id="5" name="Picture 4">
+            <a:extLst>
+              <a:ext uri="{FF2B5EF4-FFF2-40B4-BE49-F238E27FC236}">
+                <a16:creationId xmlns:a16="http://schemas.microsoft.com/office/drawing/2014/main" id="{47511C79-F718-90B2-482D-B9C30B936130}"/>
               </a:ext>
             </a:extLst>
           </p:cNvPr>
@@ -20365,8 +20098,8 @@
         </p:blipFill>
         <p:spPr>
           <a:xfrm>
-            <a:off x="325800" y="889207"/>
-            <a:ext cx="5245331" cy="5245331"/>
+            <a:off x="372751" y="996616"/>
+            <a:ext cx="5015962" cy="5015962"/>
           </a:xfrm>
           <a:prstGeom prst="rect">
             <a:avLst/>
